--- a/test/c_c_dn.pptx
+++ b/test/c_c_dn.pptx
@@ -3097,7 +3097,7 @@
         <p:spPr>
           <a:xfrm>
             <a:off x="0" y="0"/>
-            <a:ext cx="6858000" cy="3516266"/>
+            <a:ext cx="6858000" cy="1611622"/>
           </a:xfrm>
           <a:custGeom>
             <a:avLst/>
@@ -3106,387 +3106,1062 @@
             <a:cxnLst/>
             <a:rect l="l" t="t" r="r" b="b"/>
             <a:pathLst>
-              <a:path w="6858000" h="3516266">
+              <a:path w="6858000" h="1611622">
                 <a:moveTo>
-                  <a:pt x="0" y="1438160"/>
+                  <a:pt x="0" y="659157"/>
                 </a:moveTo>
                 <a:lnTo>
-                  <a:pt x="6336" y="1600324"/>
-                </a:lnTo>
-                <a:lnTo>
-                  <a:pt x="25307" y="1761500"/>
-                </a:lnTo>
-                <a:lnTo>
-                  <a:pt x="56798" y="1920703"/>
-                </a:lnTo>
-                <a:lnTo>
-                  <a:pt x="100615" y="2076964"/>
-                </a:lnTo>
-                <a:lnTo>
-                  <a:pt x="156492" y="2229329"/>
-                </a:lnTo>
-                <a:lnTo>
-                  <a:pt x="224087" y="2376870"/>
-                </a:lnTo>
-                <a:lnTo>
-                  <a:pt x="302990" y="2518686"/>
-                </a:lnTo>
-                <a:lnTo>
-                  <a:pt x="392718" y="2653912"/>
-                </a:lnTo>
-                <a:lnTo>
-                  <a:pt x="492724" y="2781725"/>
-                </a:lnTo>
-                <a:lnTo>
-                  <a:pt x="602399" y="2901344"/>
-                </a:lnTo>
-                <a:lnTo>
-                  <a:pt x="721074" y="3012041"/>
-                </a:lnTo>
-                <a:lnTo>
-                  <a:pt x="848025" y="3113139"/>
-                </a:lnTo>
-                <a:lnTo>
-                  <a:pt x="982477" y="3204023"/>
-                </a:lnTo>
-                <a:lnTo>
-                  <a:pt x="1123612" y="3284139"/>
-                </a:lnTo>
-                <a:lnTo>
-                  <a:pt x="1270567" y="3352997"/>
-                </a:lnTo>
-                <a:lnTo>
-                  <a:pt x="1422448" y="3410178"/>
-                </a:lnTo>
-                <a:lnTo>
-                  <a:pt x="1578327" y="3455333"/>
-                </a:lnTo>
-                <a:lnTo>
-                  <a:pt x="1737255" y="3488187"/>
-                </a:lnTo>
-                <a:lnTo>
-                  <a:pt x="1898261" y="3508539"/>
-                </a:lnTo>
-                <a:lnTo>
-                  <a:pt x="2060365" y="3516266"/>
-                </a:lnTo>
-                <a:lnTo>
-                  <a:pt x="2222578" y="3511319"/>
-                </a:lnTo>
-                <a:lnTo>
-                  <a:pt x="2383910" y="3493731"/>
-                </a:lnTo>
-                <a:lnTo>
-                  <a:pt x="2543377" y="3463606"/>
-                </a:lnTo>
-                <a:lnTo>
-                  <a:pt x="2700008" y="3421130"/>
-                </a:lnTo>
-                <a:lnTo>
-                  <a:pt x="2852847" y="3366562"/>
-                </a:lnTo>
-                <a:lnTo>
-                  <a:pt x="3000961" y="3300233"/>
-                </a:lnTo>
-                <a:lnTo>
-                  <a:pt x="3143449" y="3222550"/>
-                </a:lnTo>
-                <a:lnTo>
-                  <a:pt x="3279439" y="3133984"/>
-                </a:lnTo>
-                <a:lnTo>
-                  <a:pt x="3408105" y="3035077"/>
-                </a:lnTo>
-                <a:lnTo>
-                  <a:pt x="3528660" y="2926432"/>
-                </a:lnTo>
-                <a:lnTo>
-                  <a:pt x="3640370" y="2808710"/>
-                </a:lnTo>
-                <a:lnTo>
-                  <a:pt x="3742553" y="2682631"/>
-                </a:lnTo>
-                <a:lnTo>
-                  <a:pt x="3834586" y="2548963"/>
-                </a:lnTo>
-                <a:lnTo>
-                  <a:pt x="3915908" y="2408520"/>
-                </a:lnTo>
-                <a:lnTo>
-                  <a:pt x="3986024" y="2262160"/>
-                </a:lnTo>
-                <a:lnTo>
-                  <a:pt x="4044505" y="2110776"/>
-                </a:lnTo>
-                <a:lnTo>
-                  <a:pt x="4090995" y="1955289"/>
-                </a:lnTo>
-                <a:lnTo>
-                  <a:pt x="4125210" y="1796649"/>
-                </a:lnTo>
-                <a:lnTo>
-                  <a:pt x="4146942" y="1635823"/>
-                </a:lnTo>
-                <a:lnTo>
-                  <a:pt x="4156058" y="1473791"/>
-                </a:lnTo>
-                <a:lnTo>
-                  <a:pt x="4152502" y="1311542"/>
-                </a:lnTo>
-                <a:lnTo>
-                  <a:pt x="4136297" y="1150065"/>
-                </a:lnTo>
-                <a:lnTo>
-                  <a:pt x="4107541" y="990345"/>
-                </a:lnTo>
-                <a:lnTo>
-                  <a:pt x="4066410" y="833356"/>
-                </a:lnTo>
-                <a:lnTo>
-                  <a:pt x="4013153" y="680055"/>
-                </a:lnTo>
-                <a:lnTo>
-                  <a:pt x="3948097" y="531377"/>
-                </a:lnTo>
-                <a:lnTo>
-                  <a:pt x="3871637" y="388229"/>
-                </a:lnTo>
-                <a:lnTo>
-                  <a:pt x="3784241" y="251484"/>
-                </a:lnTo>
-                <a:lnTo>
-                  <a:pt x="3686441" y="121976"/>
-                </a:lnTo>
-                <a:lnTo>
-                  <a:pt x="3686441" y="121976"/>
-                </a:lnTo>
-                <a:lnTo>
-                  <a:pt x="3670218" y="103581"/>
-                </a:lnTo>
-                <a:lnTo>
-                  <a:pt x="3652684" y="86431"/>
-                </a:lnTo>
-                <a:lnTo>
-                  <a:pt x="3633934" y="70619"/>
-                </a:lnTo>
-                <a:lnTo>
-                  <a:pt x="3614070" y="56232"/>
-                </a:lnTo>
-                <a:lnTo>
-                  <a:pt x="3593200" y="43348"/>
-                </a:lnTo>
-                <a:lnTo>
-                  <a:pt x="3571437" y="32036"/>
-                </a:lnTo>
-                <a:lnTo>
-                  <a:pt x="3548901" y="22359"/>
-                </a:lnTo>
-                <a:lnTo>
-                  <a:pt x="3525712" y="14368"/>
-                </a:lnTo>
-                <a:lnTo>
-                  <a:pt x="3501998" y="8107"/>
-                </a:lnTo>
-                <a:lnTo>
-                  <a:pt x="3477886" y="3611"/>
-                </a:lnTo>
-                <a:lnTo>
-                  <a:pt x="3453510" y="904"/>
-                </a:lnTo>
-                <a:lnTo>
-                  <a:pt x="3429000" y="0"/>
-                </a:lnTo>
-                <a:lnTo>
-                  <a:pt x="3404489" y="904"/>
-                </a:lnTo>
-                <a:lnTo>
-                  <a:pt x="3380113" y="3611"/>
-                </a:lnTo>
-                <a:lnTo>
-                  <a:pt x="3356001" y="8107"/>
-                </a:lnTo>
-                <a:lnTo>
-                  <a:pt x="3332287" y="14368"/>
-                </a:lnTo>
-                <a:lnTo>
-                  <a:pt x="3309098" y="22359"/>
-                </a:lnTo>
-                <a:lnTo>
-                  <a:pt x="3286562" y="32036"/>
-                </a:lnTo>
-                <a:lnTo>
-                  <a:pt x="3264799" y="43348"/>
-                </a:lnTo>
-                <a:lnTo>
-                  <a:pt x="3243929" y="56232"/>
-                </a:lnTo>
-                <a:lnTo>
-                  <a:pt x="3224065" y="70619"/>
-                </a:lnTo>
-                <a:lnTo>
-                  <a:pt x="3205315" y="86431"/>
-                </a:lnTo>
-                <a:lnTo>
-                  <a:pt x="3187781" y="103581"/>
-                </a:lnTo>
-                <a:lnTo>
-                  <a:pt x="3171558" y="121976"/>
-                </a:lnTo>
-                <a:lnTo>
-                  <a:pt x="3171558" y="121976"/>
-                </a:lnTo>
-                <a:lnTo>
-                  <a:pt x="3073758" y="251484"/>
-                </a:lnTo>
-                <a:lnTo>
-                  <a:pt x="2986362" y="388229"/>
-                </a:lnTo>
-                <a:lnTo>
-                  <a:pt x="2909902" y="531377"/>
-                </a:lnTo>
-                <a:lnTo>
-                  <a:pt x="2844846" y="680055"/>
-                </a:lnTo>
-                <a:lnTo>
-                  <a:pt x="2791589" y="833356"/>
-                </a:lnTo>
-                <a:lnTo>
-                  <a:pt x="2750458" y="990345"/>
-                </a:lnTo>
-                <a:lnTo>
-                  <a:pt x="2721702" y="1150065"/>
-                </a:lnTo>
-                <a:lnTo>
-                  <a:pt x="2705497" y="1311542"/>
-                </a:lnTo>
-                <a:lnTo>
-                  <a:pt x="2701941" y="1473791"/>
-                </a:lnTo>
-                <a:lnTo>
-                  <a:pt x="2711057" y="1635823"/>
-                </a:lnTo>
-                <a:lnTo>
-                  <a:pt x="2732789" y="1796649"/>
-                </a:lnTo>
-                <a:lnTo>
-                  <a:pt x="2767004" y="1955289"/>
-                </a:lnTo>
-                <a:lnTo>
-                  <a:pt x="2813494" y="2110776"/>
-                </a:lnTo>
-                <a:lnTo>
-                  <a:pt x="2871975" y="2262160"/>
-                </a:lnTo>
-                <a:lnTo>
-                  <a:pt x="2942091" y="2408520"/>
-                </a:lnTo>
-                <a:lnTo>
-                  <a:pt x="3023413" y="2548963"/>
-                </a:lnTo>
-                <a:lnTo>
-                  <a:pt x="3115446" y="2682631"/>
-                </a:lnTo>
-                <a:lnTo>
-                  <a:pt x="3217629" y="2808710"/>
-                </a:lnTo>
-                <a:lnTo>
-                  <a:pt x="3329339" y="2926432"/>
-                </a:lnTo>
-                <a:lnTo>
-                  <a:pt x="3449894" y="3035077"/>
-                </a:lnTo>
-                <a:lnTo>
-                  <a:pt x="3578560" y="3133984"/>
-                </a:lnTo>
-                <a:lnTo>
-                  <a:pt x="3714550" y="3222550"/>
-                </a:lnTo>
-                <a:lnTo>
-                  <a:pt x="3857038" y="3300233"/>
-                </a:lnTo>
-                <a:lnTo>
-                  <a:pt x="4005152" y="3366562"/>
-                </a:lnTo>
-                <a:lnTo>
-                  <a:pt x="4157991" y="3421130"/>
-                </a:lnTo>
-                <a:lnTo>
-                  <a:pt x="4314622" y="3463606"/>
-                </a:lnTo>
-                <a:lnTo>
-                  <a:pt x="4474089" y="3493731"/>
-                </a:lnTo>
-                <a:lnTo>
-                  <a:pt x="4635421" y="3511319"/>
-                </a:lnTo>
-                <a:lnTo>
-                  <a:pt x="4797634" y="3516266"/>
-                </a:lnTo>
-                <a:lnTo>
-                  <a:pt x="4959738" y="3508539"/>
-                </a:lnTo>
-                <a:lnTo>
-                  <a:pt x="5120744" y="3488187"/>
-                </a:lnTo>
-                <a:lnTo>
-                  <a:pt x="5279672" y="3455333"/>
-                </a:lnTo>
-                <a:lnTo>
-                  <a:pt x="5435551" y="3410178"/>
-                </a:lnTo>
-                <a:lnTo>
-                  <a:pt x="5587432" y="3352997"/>
-                </a:lnTo>
-                <a:lnTo>
-                  <a:pt x="5734387" y="3284139"/>
-                </a:lnTo>
-                <a:lnTo>
-                  <a:pt x="5875522" y="3204023"/>
-                </a:lnTo>
-                <a:lnTo>
-                  <a:pt x="6009974" y="3113139"/>
-                </a:lnTo>
-                <a:lnTo>
-                  <a:pt x="6136925" y="3012041"/>
-                </a:lnTo>
-                <a:lnTo>
-                  <a:pt x="6255600" y="2901344"/>
-                </a:lnTo>
-                <a:lnTo>
-                  <a:pt x="6365275" y="2781725"/>
-                </a:lnTo>
-                <a:lnTo>
-                  <a:pt x="6465281" y="2653912"/>
-                </a:lnTo>
-                <a:lnTo>
-                  <a:pt x="6555009" y="2518686"/>
-                </a:lnTo>
-                <a:lnTo>
-                  <a:pt x="6633912" y="2376870"/>
-                </a:lnTo>
-                <a:lnTo>
-                  <a:pt x="6701507" y="2229329"/>
-                </a:lnTo>
-                <a:lnTo>
-                  <a:pt x="6757384" y="2076964"/>
-                </a:lnTo>
-                <a:lnTo>
-                  <a:pt x="6801201" y="1920703"/>
-                </a:lnTo>
-                <a:lnTo>
-                  <a:pt x="6832692" y="1761500"/>
-                </a:lnTo>
-                <a:lnTo>
-                  <a:pt x="6851663" y="1600324"/>
-                </a:lnTo>
-                <a:lnTo>
-                  <a:pt x="6858000" y="1438160"/>
+                  <a:pt x="2904" y="733482"/>
+                </a:lnTo>
+                <a:lnTo>
+                  <a:pt x="11599" y="807354"/>
+                </a:lnTo>
+                <a:lnTo>
+                  <a:pt x="26032" y="880322"/>
+                </a:lnTo>
+                <a:lnTo>
+                  <a:pt x="46115" y="951942"/>
+                </a:lnTo>
+                <a:lnTo>
+                  <a:pt x="71725" y="1021776"/>
+                </a:lnTo>
+                <a:lnTo>
+                  <a:pt x="102706" y="1089398"/>
+                </a:lnTo>
+                <a:lnTo>
+                  <a:pt x="138870" y="1154397"/>
+                </a:lnTo>
+                <a:lnTo>
+                  <a:pt x="179995" y="1216376"/>
+                </a:lnTo>
+                <a:lnTo>
+                  <a:pt x="225832" y="1274957"/>
+                </a:lnTo>
+                <a:lnTo>
+                  <a:pt x="276099" y="1329783"/>
+                </a:lnTo>
+                <a:lnTo>
+                  <a:pt x="330492" y="1380518"/>
+                </a:lnTo>
+                <a:lnTo>
+                  <a:pt x="388678" y="1426855"/>
+                </a:lnTo>
+                <a:lnTo>
+                  <a:pt x="450302" y="1468510"/>
+                </a:lnTo>
+                <a:lnTo>
+                  <a:pt x="514988" y="1505230"/>
+                </a:lnTo>
+                <a:lnTo>
+                  <a:pt x="582343" y="1536790"/>
+                </a:lnTo>
+                <a:lnTo>
+                  <a:pt x="651955" y="1562998"/>
+                </a:lnTo>
+                <a:lnTo>
+                  <a:pt x="723400" y="1583694"/>
+                </a:lnTo>
+                <a:lnTo>
+                  <a:pt x="796241" y="1598752"/>
+                </a:lnTo>
+                <a:lnTo>
+                  <a:pt x="870036" y="1608080"/>
+                </a:lnTo>
+                <a:lnTo>
+                  <a:pt x="944334" y="1611622"/>
+                </a:lnTo>
+                <a:lnTo>
+                  <a:pt x="1018681" y="1609354"/>
+                </a:lnTo>
+                <a:lnTo>
+                  <a:pt x="1092625" y="1601293"/>
+                </a:lnTo>
+                <a:lnTo>
+                  <a:pt x="1165714" y="1587486"/>
+                </a:lnTo>
+                <a:lnTo>
+                  <a:pt x="1237503" y="1568018"/>
+                </a:lnTo>
+                <a:lnTo>
+                  <a:pt x="1307555" y="1543007"/>
+                </a:lnTo>
+                <a:lnTo>
+                  <a:pt x="1375440" y="1512607"/>
+                </a:lnTo>
+                <a:lnTo>
+                  <a:pt x="1440747" y="1477002"/>
+                </a:lnTo>
+                <a:lnTo>
+                  <a:pt x="1503076" y="1436409"/>
+                </a:lnTo>
+                <a:lnTo>
+                  <a:pt x="1562048" y="1391077"/>
+                </a:lnTo>
+                <a:lnTo>
+                  <a:pt x="1617302" y="1341281"/>
+                </a:lnTo>
+                <a:lnTo>
+                  <a:pt x="1668502" y="1287325"/>
+                </a:lnTo>
+                <a:lnTo>
+                  <a:pt x="1715336" y="1229539"/>
+                </a:lnTo>
+                <a:lnTo>
+                  <a:pt x="1757518" y="1168274"/>
+                </a:lnTo>
+                <a:lnTo>
+                  <a:pt x="1794791" y="1103905"/>
+                </a:lnTo>
+                <a:lnTo>
+                  <a:pt x="1826927" y="1036823"/>
+                </a:lnTo>
+                <a:lnTo>
+                  <a:pt x="1853731" y="967439"/>
+                </a:lnTo>
+                <a:lnTo>
+                  <a:pt x="1875039" y="896174"/>
+                </a:lnTo>
+                <a:lnTo>
+                  <a:pt x="1890721" y="823464"/>
+                </a:lnTo>
+                <a:lnTo>
+                  <a:pt x="1900681" y="749752"/>
+                </a:lnTo>
+                <a:lnTo>
+                  <a:pt x="1904859" y="675487"/>
+                </a:lnTo>
+                <a:lnTo>
+                  <a:pt x="1903230" y="601123"/>
+                </a:lnTo>
+                <a:lnTo>
+                  <a:pt x="1895803" y="527113"/>
+                </a:lnTo>
+                <a:lnTo>
+                  <a:pt x="1882623" y="453908"/>
+                </a:lnTo>
+                <a:lnTo>
+                  <a:pt x="1863771" y="381955"/>
+                </a:lnTo>
+                <a:lnTo>
+                  <a:pt x="1839362" y="311692"/>
+                </a:lnTo>
+                <a:lnTo>
+                  <a:pt x="1809544" y="243548"/>
+                </a:lnTo>
+                <a:lnTo>
+                  <a:pt x="1774500" y="177938"/>
+                </a:lnTo>
+                <a:lnTo>
+                  <a:pt x="1734444" y="115263"/>
+                </a:lnTo>
+                <a:lnTo>
+                  <a:pt x="1689618" y="55905"/>
+                </a:lnTo>
+                <a:lnTo>
+                  <a:pt x="1689618" y="55905"/>
+                </a:lnTo>
+                <a:lnTo>
+                  <a:pt x="1682183" y="47474"/>
+                </a:lnTo>
+                <a:lnTo>
+                  <a:pt x="1674146" y="39614"/>
+                </a:lnTo>
+                <a:lnTo>
+                  <a:pt x="1665553" y="32367"/>
+                </a:lnTo>
+                <a:lnTo>
+                  <a:pt x="1656448" y="25773"/>
+                </a:lnTo>
+                <a:lnTo>
+                  <a:pt x="1646883" y="19867"/>
+                </a:lnTo>
+                <a:lnTo>
+                  <a:pt x="1636909" y="14683"/>
+                </a:lnTo>
+                <a:lnTo>
+                  <a:pt x="1626579" y="10247"/>
+                </a:lnTo>
+                <a:lnTo>
+                  <a:pt x="1615951" y="6585"/>
+                </a:lnTo>
+                <a:lnTo>
+                  <a:pt x="1605082" y="3716"/>
+                </a:lnTo>
+                <a:lnTo>
+                  <a:pt x="1594031" y="1655"/>
+                </a:lnTo>
+                <a:lnTo>
+                  <a:pt x="1582858" y="414"/>
+                </a:lnTo>
+                <a:lnTo>
+                  <a:pt x="1571625" y="0"/>
+                </a:lnTo>
+                <a:lnTo>
+                  <a:pt x="1560391" y="414"/>
+                </a:lnTo>
+                <a:lnTo>
+                  <a:pt x="1549218" y="1655"/>
+                </a:lnTo>
+                <a:lnTo>
+                  <a:pt x="1538167" y="3716"/>
+                </a:lnTo>
+                <a:lnTo>
+                  <a:pt x="1527298" y="6585"/>
+                </a:lnTo>
+                <a:lnTo>
+                  <a:pt x="1516670" y="10247"/>
+                </a:lnTo>
+                <a:lnTo>
+                  <a:pt x="1506340" y="14683"/>
+                </a:lnTo>
+                <a:lnTo>
+                  <a:pt x="1496366" y="19867"/>
+                </a:lnTo>
+                <a:lnTo>
+                  <a:pt x="1486801" y="25773"/>
+                </a:lnTo>
+                <a:lnTo>
+                  <a:pt x="1477696" y="32367"/>
+                </a:lnTo>
+                <a:lnTo>
+                  <a:pt x="1469103" y="39614"/>
+                </a:lnTo>
+                <a:lnTo>
+                  <a:pt x="1461066" y="47474"/>
+                </a:lnTo>
+                <a:lnTo>
+                  <a:pt x="1453631" y="55905"/>
+                </a:lnTo>
+                <a:lnTo>
+                  <a:pt x="1453631" y="55905"/>
+                </a:lnTo>
+                <a:lnTo>
+                  <a:pt x="1401269" y="126261"/>
+                </a:lnTo>
+                <a:lnTo>
+                  <a:pt x="1355601" y="201135"/>
+                </a:lnTo>
+                <a:lnTo>
+                  <a:pt x="1317014" y="279892"/>
+                </a:lnTo>
+                <a:lnTo>
+                  <a:pt x="1285833" y="361864"/>
+                </a:lnTo>
+                <a:lnTo>
+                  <a:pt x="1262325" y="446357"/>
+                </a:lnTo>
+                <a:lnTo>
+                  <a:pt x="1246687" y="532653"/>
+                </a:lnTo>
+                <a:lnTo>
+                  <a:pt x="1239054" y="620022"/>
+                </a:lnTo>
+                <a:lnTo>
+                  <a:pt x="1239488" y="707723"/>
+                </a:lnTo>
+                <a:lnTo>
+                  <a:pt x="1247988" y="795013"/>
+                </a:lnTo>
+                <a:lnTo>
+                  <a:pt x="1264480" y="881150"/>
+                </a:lnTo>
+                <a:lnTo>
+                  <a:pt x="1288825" y="965405"/>
+                </a:lnTo>
+                <a:lnTo>
+                  <a:pt x="1320816" y="1047065"/>
+                </a:lnTo>
+                <a:lnTo>
+                  <a:pt x="1360183" y="1125435"/>
+                </a:lnTo>
+                <a:lnTo>
+                  <a:pt x="1406591" y="1199852"/>
+                </a:lnTo>
+                <a:lnTo>
+                  <a:pt x="1459647" y="1269686"/>
+                </a:lnTo>
+                <a:lnTo>
+                  <a:pt x="1518902" y="1334343"/>
+                </a:lnTo>
+                <a:lnTo>
+                  <a:pt x="1583852" y="1393276"/>
+                </a:lnTo>
+                <a:lnTo>
+                  <a:pt x="1653947" y="1445985"/>
+                </a:lnTo>
+                <a:lnTo>
+                  <a:pt x="1728594" y="1492024"/>
+                </a:lnTo>
+                <a:lnTo>
+                  <a:pt x="1807158" y="1531002"/>
+                </a:lnTo>
+                <a:lnTo>
+                  <a:pt x="1888975" y="1562588"/>
+                </a:lnTo>
+                <a:lnTo>
+                  <a:pt x="1973350" y="1586515"/>
+                </a:lnTo>
+                <a:lnTo>
+                  <a:pt x="2059568" y="1602580"/>
+                </a:lnTo>
+                <a:lnTo>
+                  <a:pt x="2146898" y="1610647"/>
+                </a:lnTo>
+                <a:lnTo>
+                  <a:pt x="2234601" y="1610647"/>
+                </a:lnTo>
+                <a:lnTo>
+                  <a:pt x="2321931" y="1602580"/>
+                </a:lnTo>
+                <a:lnTo>
+                  <a:pt x="2408149" y="1586515"/>
+                </a:lnTo>
+                <a:lnTo>
+                  <a:pt x="2492524" y="1562588"/>
+                </a:lnTo>
+                <a:lnTo>
+                  <a:pt x="2574341" y="1531002"/>
+                </a:lnTo>
+                <a:lnTo>
+                  <a:pt x="2652905" y="1492024"/>
+                </a:lnTo>
+                <a:lnTo>
+                  <a:pt x="2727552" y="1445985"/>
+                </a:lnTo>
+                <a:lnTo>
+                  <a:pt x="2797647" y="1393276"/>
+                </a:lnTo>
+                <a:lnTo>
+                  <a:pt x="2862597" y="1334343"/>
+                </a:lnTo>
+                <a:lnTo>
+                  <a:pt x="2921852" y="1269686"/>
+                </a:lnTo>
+                <a:lnTo>
+                  <a:pt x="2974908" y="1199852"/>
+                </a:lnTo>
+                <a:lnTo>
+                  <a:pt x="3021316" y="1125435"/>
+                </a:lnTo>
+                <a:lnTo>
+                  <a:pt x="3060683" y="1047065"/>
+                </a:lnTo>
+                <a:lnTo>
+                  <a:pt x="3092674" y="965405"/>
+                </a:lnTo>
+                <a:lnTo>
+                  <a:pt x="3117019" y="881150"/>
+                </a:lnTo>
+                <a:lnTo>
+                  <a:pt x="3133511" y="795013"/>
+                </a:lnTo>
+                <a:lnTo>
+                  <a:pt x="3142011" y="707723"/>
+                </a:lnTo>
+                <a:lnTo>
+                  <a:pt x="3142445" y="620022"/>
+                </a:lnTo>
+                <a:lnTo>
+                  <a:pt x="3134812" y="532653"/>
+                </a:lnTo>
+                <a:lnTo>
+                  <a:pt x="3119174" y="446357"/>
+                </a:lnTo>
+                <a:lnTo>
+                  <a:pt x="3095666" y="361864"/>
+                </a:lnTo>
+                <a:lnTo>
+                  <a:pt x="3064485" y="279892"/>
+                </a:lnTo>
+                <a:lnTo>
+                  <a:pt x="3025898" y="201135"/>
+                </a:lnTo>
+                <a:lnTo>
+                  <a:pt x="2980230" y="126261"/>
+                </a:lnTo>
+                <a:lnTo>
+                  <a:pt x="2927868" y="55905"/>
+                </a:lnTo>
+                <a:lnTo>
+                  <a:pt x="2927868" y="55905"/>
+                </a:lnTo>
+                <a:lnTo>
+                  <a:pt x="2920433" y="47474"/>
+                </a:lnTo>
+                <a:lnTo>
+                  <a:pt x="2912396" y="39614"/>
+                </a:lnTo>
+                <a:lnTo>
+                  <a:pt x="2903803" y="32367"/>
+                </a:lnTo>
+                <a:lnTo>
+                  <a:pt x="2894698" y="25773"/>
+                </a:lnTo>
+                <a:lnTo>
+                  <a:pt x="2885133" y="19867"/>
+                </a:lnTo>
+                <a:lnTo>
+                  <a:pt x="2875159" y="14683"/>
+                </a:lnTo>
+                <a:lnTo>
+                  <a:pt x="2864829" y="10247"/>
+                </a:lnTo>
+                <a:lnTo>
+                  <a:pt x="2854201" y="6585"/>
+                </a:lnTo>
+                <a:lnTo>
+                  <a:pt x="2843332" y="3716"/>
+                </a:lnTo>
+                <a:lnTo>
+                  <a:pt x="2832281" y="1655"/>
+                </a:lnTo>
+                <a:lnTo>
+                  <a:pt x="2821108" y="414"/>
+                </a:lnTo>
+                <a:lnTo>
+                  <a:pt x="2809875" y="0"/>
+                </a:lnTo>
+                <a:lnTo>
+                  <a:pt x="2798641" y="414"/>
+                </a:lnTo>
+                <a:lnTo>
+                  <a:pt x="2787468" y="1655"/>
+                </a:lnTo>
+                <a:lnTo>
+                  <a:pt x="2776417" y="3716"/>
+                </a:lnTo>
+                <a:lnTo>
+                  <a:pt x="2765548" y="6585"/>
+                </a:lnTo>
+                <a:lnTo>
+                  <a:pt x="2754920" y="10247"/>
+                </a:lnTo>
+                <a:lnTo>
+                  <a:pt x="2744590" y="14683"/>
+                </a:lnTo>
+                <a:lnTo>
+                  <a:pt x="2734616" y="19867"/>
+                </a:lnTo>
+                <a:lnTo>
+                  <a:pt x="2725051" y="25773"/>
+                </a:lnTo>
+                <a:lnTo>
+                  <a:pt x="2715946" y="32367"/>
+                </a:lnTo>
+                <a:lnTo>
+                  <a:pt x="2707353" y="39614"/>
+                </a:lnTo>
+                <a:lnTo>
+                  <a:pt x="2699316" y="47474"/>
+                </a:lnTo>
+                <a:lnTo>
+                  <a:pt x="2691881" y="55905"/>
+                </a:lnTo>
+                <a:lnTo>
+                  <a:pt x="2691881" y="55905"/>
+                </a:lnTo>
+                <a:lnTo>
+                  <a:pt x="2639519" y="126261"/>
+                </a:lnTo>
+                <a:lnTo>
+                  <a:pt x="2593851" y="201135"/>
+                </a:lnTo>
+                <a:lnTo>
+                  <a:pt x="2555264" y="279892"/>
+                </a:lnTo>
+                <a:lnTo>
+                  <a:pt x="2524083" y="361864"/>
+                </a:lnTo>
+                <a:lnTo>
+                  <a:pt x="2500575" y="446357"/>
+                </a:lnTo>
+                <a:lnTo>
+                  <a:pt x="2484937" y="532653"/>
+                </a:lnTo>
+                <a:lnTo>
+                  <a:pt x="2477304" y="620022"/>
+                </a:lnTo>
+                <a:lnTo>
+                  <a:pt x="2477738" y="707723"/>
+                </a:lnTo>
+                <a:lnTo>
+                  <a:pt x="2486238" y="795013"/>
+                </a:lnTo>
+                <a:lnTo>
+                  <a:pt x="2502730" y="881150"/>
+                </a:lnTo>
+                <a:lnTo>
+                  <a:pt x="2527075" y="965405"/>
+                </a:lnTo>
+                <a:lnTo>
+                  <a:pt x="2559066" y="1047065"/>
+                </a:lnTo>
+                <a:lnTo>
+                  <a:pt x="2598433" y="1125435"/>
+                </a:lnTo>
+                <a:lnTo>
+                  <a:pt x="2644841" y="1199852"/>
+                </a:lnTo>
+                <a:lnTo>
+                  <a:pt x="2697897" y="1269686"/>
+                </a:lnTo>
+                <a:lnTo>
+                  <a:pt x="2757152" y="1334343"/>
+                </a:lnTo>
+                <a:lnTo>
+                  <a:pt x="2822102" y="1393276"/>
+                </a:lnTo>
+                <a:lnTo>
+                  <a:pt x="2892197" y="1445985"/>
+                </a:lnTo>
+                <a:lnTo>
+                  <a:pt x="2966844" y="1492024"/>
+                </a:lnTo>
+                <a:lnTo>
+                  <a:pt x="3045408" y="1531002"/>
+                </a:lnTo>
+                <a:lnTo>
+                  <a:pt x="3127225" y="1562588"/>
+                </a:lnTo>
+                <a:lnTo>
+                  <a:pt x="3211600" y="1586515"/>
+                </a:lnTo>
+                <a:lnTo>
+                  <a:pt x="3297818" y="1602580"/>
+                </a:lnTo>
+                <a:lnTo>
+                  <a:pt x="3385148" y="1610647"/>
+                </a:lnTo>
+                <a:lnTo>
+                  <a:pt x="3472851" y="1610647"/>
+                </a:lnTo>
+                <a:lnTo>
+                  <a:pt x="3560181" y="1602580"/>
+                </a:lnTo>
+                <a:lnTo>
+                  <a:pt x="3646399" y="1586515"/>
+                </a:lnTo>
+                <a:lnTo>
+                  <a:pt x="3730774" y="1562588"/>
+                </a:lnTo>
+                <a:lnTo>
+                  <a:pt x="3812591" y="1531002"/>
+                </a:lnTo>
+                <a:lnTo>
+                  <a:pt x="3891155" y="1492024"/>
+                </a:lnTo>
+                <a:lnTo>
+                  <a:pt x="3965802" y="1445985"/>
+                </a:lnTo>
+                <a:lnTo>
+                  <a:pt x="4035897" y="1393276"/>
+                </a:lnTo>
+                <a:lnTo>
+                  <a:pt x="4100847" y="1334343"/>
+                </a:lnTo>
+                <a:lnTo>
+                  <a:pt x="4160102" y="1269686"/>
+                </a:lnTo>
+                <a:lnTo>
+                  <a:pt x="4213158" y="1199852"/>
+                </a:lnTo>
+                <a:lnTo>
+                  <a:pt x="4259566" y="1125435"/>
+                </a:lnTo>
+                <a:lnTo>
+                  <a:pt x="4298933" y="1047065"/>
+                </a:lnTo>
+                <a:lnTo>
+                  <a:pt x="4330924" y="965405"/>
+                </a:lnTo>
+                <a:lnTo>
+                  <a:pt x="4355269" y="881150"/>
+                </a:lnTo>
+                <a:lnTo>
+                  <a:pt x="4371761" y="795013"/>
+                </a:lnTo>
+                <a:lnTo>
+                  <a:pt x="4380261" y="707723"/>
+                </a:lnTo>
+                <a:lnTo>
+                  <a:pt x="4380695" y="620022"/>
+                </a:lnTo>
+                <a:lnTo>
+                  <a:pt x="4373062" y="532653"/>
+                </a:lnTo>
+                <a:lnTo>
+                  <a:pt x="4357424" y="446357"/>
+                </a:lnTo>
+                <a:lnTo>
+                  <a:pt x="4333916" y="361864"/>
+                </a:lnTo>
+                <a:lnTo>
+                  <a:pt x="4302735" y="279892"/>
+                </a:lnTo>
+                <a:lnTo>
+                  <a:pt x="4264148" y="201135"/>
+                </a:lnTo>
+                <a:lnTo>
+                  <a:pt x="4218480" y="126261"/>
+                </a:lnTo>
+                <a:lnTo>
+                  <a:pt x="4166118" y="55905"/>
+                </a:lnTo>
+                <a:lnTo>
+                  <a:pt x="4166118" y="55905"/>
+                </a:lnTo>
+                <a:lnTo>
+                  <a:pt x="4158683" y="47474"/>
+                </a:lnTo>
+                <a:lnTo>
+                  <a:pt x="4150646" y="39614"/>
+                </a:lnTo>
+                <a:lnTo>
+                  <a:pt x="4142053" y="32367"/>
+                </a:lnTo>
+                <a:lnTo>
+                  <a:pt x="4132948" y="25773"/>
+                </a:lnTo>
+                <a:lnTo>
+                  <a:pt x="4123383" y="19867"/>
+                </a:lnTo>
+                <a:lnTo>
+                  <a:pt x="4113409" y="14683"/>
+                </a:lnTo>
+                <a:lnTo>
+                  <a:pt x="4103079" y="10247"/>
+                </a:lnTo>
+                <a:lnTo>
+                  <a:pt x="4092451" y="6585"/>
+                </a:lnTo>
+                <a:lnTo>
+                  <a:pt x="4081582" y="3716"/>
+                </a:lnTo>
+                <a:lnTo>
+                  <a:pt x="4070531" y="1655"/>
+                </a:lnTo>
+                <a:lnTo>
+                  <a:pt x="4059358" y="414"/>
+                </a:lnTo>
+                <a:lnTo>
+                  <a:pt x="4048125" y="0"/>
+                </a:lnTo>
+                <a:lnTo>
+                  <a:pt x="4036891" y="414"/>
+                </a:lnTo>
+                <a:lnTo>
+                  <a:pt x="4025718" y="1655"/>
+                </a:lnTo>
+                <a:lnTo>
+                  <a:pt x="4014667" y="3716"/>
+                </a:lnTo>
+                <a:lnTo>
+                  <a:pt x="4003798" y="6585"/>
+                </a:lnTo>
+                <a:lnTo>
+                  <a:pt x="3993170" y="10247"/>
+                </a:lnTo>
+                <a:lnTo>
+                  <a:pt x="3982840" y="14683"/>
+                </a:lnTo>
+                <a:lnTo>
+                  <a:pt x="3972866" y="19867"/>
+                </a:lnTo>
+                <a:lnTo>
+                  <a:pt x="3963301" y="25773"/>
+                </a:lnTo>
+                <a:lnTo>
+                  <a:pt x="3954196" y="32367"/>
+                </a:lnTo>
+                <a:lnTo>
+                  <a:pt x="3945603" y="39614"/>
+                </a:lnTo>
+                <a:lnTo>
+                  <a:pt x="3937566" y="47474"/>
+                </a:lnTo>
+                <a:lnTo>
+                  <a:pt x="3930131" y="55905"/>
+                </a:lnTo>
+                <a:lnTo>
+                  <a:pt x="3930131" y="55905"/>
+                </a:lnTo>
+                <a:lnTo>
+                  <a:pt x="3877769" y="126261"/>
+                </a:lnTo>
+                <a:lnTo>
+                  <a:pt x="3832101" y="201135"/>
+                </a:lnTo>
+                <a:lnTo>
+                  <a:pt x="3793514" y="279892"/>
+                </a:lnTo>
+                <a:lnTo>
+                  <a:pt x="3762333" y="361864"/>
+                </a:lnTo>
+                <a:lnTo>
+                  <a:pt x="3738825" y="446357"/>
+                </a:lnTo>
+                <a:lnTo>
+                  <a:pt x="3723187" y="532653"/>
+                </a:lnTo>
+                <a:lnTo>
+                  <a:pt x="3715554" y="620022"/>
+                </a:lnTo>
+                <a:lnTo>
+                  <a:pt x="3715988" y="707723"/>
+                </a:lnTo>
+                <a:lnTo>
+                  <a:pt x="3724488" y="795013"/>
+                </a:lnTo>
+                <a:lnTo>
+                  <a:pt x="3740980" y="881150"/>
+                </a:lnTo>
+                <a:lnTo>
+                  <a:pt x="3765325" y="965405"/>
+                </a:lnTo>
+                <a:lnTo>
+                  <a:pt x="3797316" y="1047065"/>
+                </a:lnTo>
+                <a:lnTo>
+                  <a:pt x="3836683" y="1125435"/>
+                </a:lnTo>
+                <a:lnTo>
+                  <a:pt x="3883091" y="1199852"/>
+                </a:lnTo>
+                <a:lnTo>
+                  <a:pt x="3936147" y="1269686"/>
+                </a:lnTo>
+                <a:lnTo>
+                  <a:pt x="3995402" y="1334343"/>
+                </a:lnTo>
+                <a:lnTo>
+                  <a:pt x="4060352" y="1393276"/>
+                </a:lnTo>
+                <a:lnTo>
+                  <a:pt x="4130447" y="1445985"/>
+                </a:lnTo>
+                <a:lnTo>
+                  <a:pt x="4205094" y="1492024"/>
+                </a:lnTo>
+                <a:lnTo>
+                  <a:pt x="4283658" y="1531002"/>
+                </a:lnTo>
+                <a:lnTo>
+                  <a:pt x="4365475" y="1562588"/>
+                </a:lnTo>
+                <a:lnTo>
+                  <a:pt x="4449850" y="1586515"/>
+                </a:lnTo>
+                <a:lnTo>
+                  <a:pt x="4536068" y="1602580"/>
+                </a:lnTo>
+                <a:lnTo>
+                  <a:pt x="4623398" y="1610647"/>
+                </a:lnTo>
+                <a:lnTo>
+                  <a:pt x="4711101" y="1610647"/>
+                </a:lnTo>
+                <a:lnTo>
+                  <a:pt x="4798431" y="1602580"/>
+                </a:lnTo>
+                <a:lnTo>
+                  <a:pt x="4884649" y="1586515"/>
+                </a:lnTo>
+                <a:lnTo>
+                  <a:pt x="4969024" y="1562588"/>
+                </a:lnTo>
+                <a:lnTo>
+                  <a:pt x="5050841" y="1531002"/>
+                </a:lnTo>
+                <a:lnTo>
+                  <a:pt x="5129405" y="1492024"/>
+                </a:lnTo>
+                <a:lnTo>
+                  <a:pt x="5204052" y="1445985"/>
+                </a:lnTo>
+                <a:lnTo>
+                  <a:pt x="5274147" y="1393276"/>
+                </a:lnTo>
+                <a:lnTo>
+                  <a:pt x="5339097" y="1334343"/>
+                </a:lnTo>
+                <a:lnTo>
+                  <a:pt x="5398352" y="1269686"/>
+                </a:lnTo>
+                <a:lnTo>
+                  <a:pt x="5451408" y="1199852"/>
+                </a:lnTo>
+                <a:lnTo>
+                  <a:pt x="5497816" y="1125435"/>
+                </a:lnTo>
+                <a:lnTo>
+                  <a:pt x="5537183" y="1047065"/>
+                </a:lnTo>
+                <a:lnTo>
+                  <a:pt x="5569174" y="965405"/>
+                </a:lnTo>
+                <a:lnTo>
+                  <a:pt x="5593519" y="881150"/>
+                </a:lnTo>
+                <a:lnTo>
+                  <a:pt x="5610011" y="795013"/>
+                </a:lnTo>
+                <a:lnTo>
+                  <a:pt x="5618511" y="707723"/>
+                </a:lnTo>
+                <a:lnTo>
+                  <a:pt x="5618945" y="620022"/>
+                </a:lnTo>
+                <a:lnTo>
+                  <a:pt x="5611312" y="532653"/>
+                </a:lnTo>
+                <a:lnTo>
+                  <a:pt x="5595674" y="446357"/>
+                </a:lnTo>
+                <a:lnTo>
+                  <a:pt x="5572166" y="361864"/>
+                </a:lnTo>
+                <a:lnTo>
+                  <a:pt x="5540985" y="279892"/>
+                </a:lnTo>
+                <a:lnTo>
+                  <a:pt x="5502398" y="201135"/>
+                </a:lnTo>
+                <a:lnTo>
+                  <a:pt x="5456730" y="126261"/>
+                </a:lnTo>
+                <a:lnTo>
+                  <a:pt x="5404368" y="55905"/>
+                </a:lnTo>
+                <a:lnTo>
+                  <a:pt x="5404368" y="55905"/>
+                </a:lnTo>
+                <a:lnTo>
+                  <a:pt x="5396933" y="47474"/>
+                </a:lnTo>
+                <a:lnTo>
+                  <a:pt x="5388896" y="39614"/>
+                </a:lnTo>
+                <a:lnTo>
+                  <a:pt x="5380303" y="32367"/>
+                </a:lnTo>
+                <a:lnTo>
+                  <a:pt x="5371198" y="25773"/>
+                </a:lnTo>
+                <a:lnTo>
+                  <a:pt x="5361633" y="19867"/>
+                </a:lnTo>
+                <a:lnTo>
+                  <a:pt x="5351659" y="14683"/>
+                </a:lnTo>
+                <a:lnTo>
+                  <a:pt x="5341329" y="10247"/>
+                </a:lnTo>
+                <a:lnTo>
+                  <a:pt x="5330701" y="6585"/>
+                </a:lnTo>
+                <a:lnTo>
+                  <a:pt x="5319832" y="3716"/>
+                </a:lnTo>
+                <a:lnTo>
+                  <a:pt x="5308781" y="1655"/>
+                </a:lnTo>
+                <a:lnTo>
+                  <a:pt x="5297608" y="414"/>
+                </a:lnTo>
+                <a:lnTo>
+                  <a:pt x="5286375" y="0"/>
+                </a:lnTo>
+                <a:lnTo>
+                  <a:pt x="5275141" y="414"/>
+                </a:lnTo>
+                <a:lnTo>
+                  <a:pt x="5263968" y="1655"/>
+                </a:lnTo>
+                <a:lnTo>
+                  <a:pt x="5252917" y="3716"/>
+                </a:lnTo>
+                <a:lnTo>
+                  <a:pt x="5242048" y="6585"/>
+                </a:lnTo>
+                <a:lnTo>
+                  <a:pt x="5231420" y="10247"/>
+                </a:lnTo>
+                <a:lnTo>
+                  <a:pt x="5221090" y="14683"/>
+                </a:lnTo>
+                <a:lnTo>
+                  <a:pt x="5211116" y="19867"/>
+                </a:lnTo>
+                <a:lnTo>
+                  <a:pt x="5201551" y="25773"/>
+                </a:lnTo>
+                <a:lnTo>
+                  <a:pt x="5192446" y="32367"/>
+                </a:lnTo>
+                <a:lnTo>
+                  <a:pt x="5183853" y="39614"/>
+                </a:lnTo>
+                <a:lnTo>
+                  <a:pt x="5175816" y="47474"/>
+                </a:lnTo>
+                <a:lnTo>
+                  <a:pt x="5168381" y="55905"/>
+                </a:lnTo>
+                <a:lnTo>
+                  <a:pt x="5168381" y="55905"/>
+                </a:lnTo>
+                <a:lnTo>
+                  <a:pt x="5123555" y="115263"/>
+                </a:lnTo>
+                <a:lnTo>
+                  <a:pt x="5083499" y="177938"/>
+                </a:lnTo>
+                <a:lnTo>
+                  <a:pt x="5048455" y="243548"/>
+                </a:lnTo>
+                <a:lnTo>
+                  <a:pt x="5018637" y="311692"/>
+                </a:lnTo>
+                <a:lnTo>
+                  <a:pt x="4994228" y="381955"/>
+                </a:lnTo>
+                <a:lnTo>
+                  <a:pt x="4975376" y="453908"/>
+                </a:lnTo>
+                <a:lnTo>
+                  <a:pt x="4962196" y="527113"/>
+                </a:lnTo>
+                <a:lnTo>
+                  <a:pt x="4954769" y="601123"/>
+                </a:lnTo>
+                <a:lnTo>
+                  <a:pt x="4953140" y="675487"/>
+                </a:lnTo>
+                <a:lnTo>
+                  <a:pt x="4957318" y="749752"/>
+                </a:lnTo>
+                <a:lnTo>
+                  <a:pt x="4967278" y="823464"/>
+                </a:lnTo>
+                <a:lnTo>
+                  <a:pt x="4982960" y="896174"/>
+                </a:lnTo>
+                <a:lnTo>
+                  <a:pt x="5004268" y="967439"/>
+                </a:lnTo>
+                <a:lnTo>
+                  <a:pt x="5031072" y="1036823"/>
+                </a:lnTo>
+                <a:lnTo>
+                  <a:pt x="5063208" y="1103905"/>
+                </a:lnTo>
+                <a:lnTo>
+                  <a:pt x="5100481" y="1168274"/>
+                </a:lnTo>
+                <a:lnTo>
+                  <a:pt x="5142663" y="1229539"/>
+                </a:lnTo>
+                <a:lnTo>
+                  <a:pt x="5189497" y="1287325"/>
+                </a:lnTo>
+                <a:lnTo>
+                  <a:pt x="5240697" y="1341281"/>
+                </a:lnTo>
+                <a:lnTo>
+                  <a:pt x="5295951" y="1391077"/>
+                </a:lnTo>
+                <a:lnTo>
+                  <a:pt x="5354923" y="1436409"/>
+                </a:lnTo>
+                <a:lnTo>
+                  <a:pt x="5417252" y="1477002"/>
+                </a:lnTo>
+                <a:lnTo>
+                  <a:pt x="5482559" y="1512607"/>
+                </a:lnTo>
+                <a:lnTo>
+                  <a:pt x="5550444" y="1543007"/>
+                </a:lnTo>
+                <a:lnTo>
+                  <a:pt x="5620496" y="1568018"/>
+                </a:lnTo>
+                <a:lnTo>
+                  <a:pt x="5692285" y="1587486"/>
+                </a:lnTo>
+                <a:lnTo>
+                  <a:pt x="5765374" y="1601293"/>
+                </a:lnTo>
+                <a:lnTo>
+                  <a:pt x="5839318" y="1609354"/>
+                </a:lnTo>
+                <a:lnTo>
+                  <a:pt x="5913665" y="1611622"/>
+                </a:lnTo>
+                <a:lnTo>
+                  <a:pt x="5987963" y="1608080"/>
+                </a:lnTo>
+                <a:lnTo>
+                  <a:pt x="6061758" y="1598752"/>
+                </a:lnTo>
+                <a:lnTo>
+                  <a:pt x="6134599" y="1583694"/>
+                </a:lnTo>
+                <a:lnTo>
+                  <a:pt x="6206044" y="1562998"/>
+                </a:lnTo>
+                <a:lnTo>
+                  <a:pt x="6275656" y="1536790"/>
+                </a:lnTo>
+                <a:lnTo>
+                  <a:pt x="6343011" y="1505230"/>
+                </a:lnTo>
+                <a:lnTo>
+                  <a:pt x="6407697" y="1468510"/>
+                </a:lnTo>
+                <a:lnTo>
+                  <a:pt x="6469321" y="1426855"/>
+                </a:lnTo>
+                <a:lnTo>
+                  <a:pt x="6527507" y="1380518"/>
+                </a:lnTo>
+                <a:lnTo>
+                  <a:pt x="6581900" y="1329783"/>
+                </a:lnTo>
+                <a:lnTo>
+                  <a:pt x="6632167" y="1274957"/>
+                </a:lnTo>
+                <a:lnTo>
+                  <a:pt x="6678004" y="1216376"/>
+                </a:lnTo>
+                <a:lnTo>
+                  <a:pt x="6719129" y="1154397"/>
+                </a:lnTo>
+                <a:lnTo>
+                  <a:pt x="6755293" y="1089398"/>
+                </a:lnTo>
+                <a:lnTo>
+                  <a:pt x="6786274" y="1021776"/>
+                </a:lnTo>
+                <a:lnTo>
+                  <a:pt x="6811884" y="951942"/>
+                </a:lnTo>
+                <a:lnTo>
+                  <a:pt x="6831967" y="880322"/>
+                </a:lnTo>
+                <a:lnTo>
+                  <a:pt x="6846400" y="807354"/>
+                </a:lnTo>
+                <a:lnTo>
+                  <a:pt x="6855095" y="733482"/>
+                </a:lnTo>
+                <a:lnTo>
+                  <a:pt x="6858000" y="659157"/>
                 </a:lnTo>
               </a:path>
             </a:pathLst>
           </a:custGeom>
           <a:noFill/>
-          <a:ln w="4572">
+          <a:ln w="9144">
             <a:solidFill>
               <a:srgbClr val="0000FF"/>
             </a:solidFill>
